--- a/Презентација.pptx
+++ b/Презентација.pptx
@@ -114,6 +114,11 @@
       </a:defRPr>
     </a:lvl9pPr>
   </p:defaultTextStyle>
+  <p:extLst>
+    <p:ext uri="{EFAFB233-063F-42B5-8137-9DF3F51BA10A}">
+      <p15:sldGuideLst xmlns:p15="http://schemas.microsoft.com/office/powerpoint/2012/main"/>
+    </p:ext>
+  </p:extLst>
 </p:presentation>
 </file>
 
@@ -3208,7 +3213,7 @@
           <a:p>
             <a:fld id="{62DDCF35-D986-F641-8505-CBF1E7F26D8D}" type="datetimeFigureOut">
               <a:rPr lang="en-US" smtClean="0"/>
-              <a:t>5/8/26</a:t>
+              <a:t>5/9/2026</a:t>
             </a:fld>
             <a:endParaRPr lang="en-US"/>
           </a:p>
@@ -3378,7 +3383,7 @@
           <a:p>
             <a:fld id="{62DDCF35-D986-F641-8505-CBF1E7F26D8D}" type="datetimeFigureOut">
               <a:rPr lang="en-US" smtClean="0"/>
-              <a:t>5/8/26</a:t>
+              <a:t>5/9/2026</a:t>
             </a:fld>
             <a:endParaRPr lang="en-US"/>
           </a:p>
@@ -3558,7 +3563,7 @@
           <a:p>
             <a:fld id="{62DDCF35-D986-F641-8505-CBF1E7F26D8D}" type="datetimeFigureOut">
               <a:rPr lang="en-US" smtClean="0"/>
-              <a:t>5/8/26</a:t>
+              <a:t>5/9/2026</a:t>
             </a:fld>
             <a:endParaRPr lang="en-US"/>
           </a:p>
@@ -3728,7 +3733,7 @@
           <a:p>
             <a:fld id="{62DDCF35-D986-F641-8505-CBF1E7F26D8D}" type="datetimeFigureOut">
               <a:rPr lang="en-US" smtClean="0"/>
-              <a:t>5/8/26</a:t>
+              <a:t>5/9/2026</a:t>
             </a:fld>
             <a:endParaRPr lang="en-US"/>
           </a:p>
@@ -3974,7 +3979,7 @@
           <a:p>
             <a:fld id="{62DDCF35-D986-F641-8505-CBF1E7F26D8D}" type="datetimeFigureOut">
               <a:rPr lang="en-US" smtClean="0"/>
-              <a:t>5/8/26</a:t>
+              <a:t>5/9/2026</a:t>
             </a:fld>
             <a:endParaRPr lang="en-US"/>
           </a:p>
@@ -4206,7 +4211,7 @@
           <a:p>
             <a:fld id="{62DDCF35-D986-F641-8505-CBF1E7F26D8D}" type="datetimeFigureOut">
               <a:rPr lang="en-US" smtClean="0"/>
-              <a:t>5/8/26</a:t>
+              <a:t>5/9/2026</a:t>
             </a:fld>
             <a:endParaRPr lang="en-US"/>
           </a:p>
@@ -4573,7 +4578,7 @@
           <a:p>
             <a:fld id="{62DDCF35-D986-F641-8505-CBF1E7F26D8D}" type="datetimeFigureOut">
               <a:rPr lang="en-US" smtClean="0"/>
-              <a:t>5/8/26</a:t>
+              <a:t>5/9/2026</a:t>
             </a:fld>
             <a:endParaRPr lang="en-US"/>
           </a:p>
@@ -4691,7 +4696,7 @@
           <a:p>
             <a:fld id="{62DDCF35-D986-F641-8505-CBF1E7F26D8D}" type="datetimeFigureOut">
               <a:rPr lang="en-US" smtClean="0"/>
-              <a:t>5/8/26</a:t>
+              <a:t>5/9/2026</a:t>
             </a:fld>
             <a:endParaRPr lang="en-US"/>
           </a:p>
@@ -4786,7 +4791,7 @@
           <a:p>
             <a:fld id="{62DDCF35-D986-F641-8505-CBF1E7F26D8D}" type="datetimeFigureOut">
               <a:rPr lang="en-US" smtClean="0"/>
-              <a:t>5/8/26</a:t>
+              <a:t>5/9/2026</a:t>
             </a:fld>
             <a:endParaRPr lang="en-US"/>
           </a:p>
@@ -5063,7 +5068,7 @@
           <a:p>
             <a:fld id="{62DDCF35-D986-F641-8505-CBF1E7F26D8D}" type="datetimeFigureOut">
               <a:rPr lang="en-US" smtClean="0"/>
-              <a:t>5/8/26</a:t>
+              <a:t>5/9/2026</a:t>
             </a:fld>
             <a:endParaRPr lang="en-US"/>
           </a:p>
@@ -5320,7 +5325,7 @@
           <a:p>
             <a:fld id="{62DDCF35-D986-F641-8505-CBF1E7F26D8D}" type="datetimeFigureOut">
               <a:rPr lang="en-US" smtClean="0"/>
-              <a:t>5/8/26</a:t>
+              <a:t>5/9/2026</a:t>
             </a:fld>
             <a:endParaRPr lang="en-US"/>
           </a:p>
@@ -5532,7 +5537,7 @@
           <a:p>
             <a:fld id="{62DDCF35-D986-F641-8505-CBF1E7F26D8D}" type="datetimeFigureOut">
               <a:rPr lang="en-US" smtClean="0"/>
-              <a:t>5/8/26</a:t>
+              <a:t>5/9/2026</a:t>
             </a:fld>
             <a:endParaRPr lang="en-US"/>
           </a:p>
@@ -6439,13 +6444,13 @@
   <p:clrMapOvr>
     <a:masterClrMapping/>
   </p:clrMapOvr>
-  <mc:AlternateContent xmlns:mc="http://schemas.openxmlformats.org/markup-compatibility/2006">
-    <mc:Choice xmlns:p159="http://schemas.microsoft.com/office/powerpoint/2015/09/main" Requires="p159">
+  <mc:AlternateContent xmlns:mc="http://schemas.openxmlformats.org/markup-compatibility/2006" xmlns:p159="http://schemas.microsoft.com/office/powerpoint/2015/09/main">
+    <mc:Choice Requires="p159">
       <p:transition xmlns:p14="http://schemas.microsoft.com/office/powerpoint/2010/main" spd="slow" p14:dur="2000">
         <p159:morph option="byObject"/>
       </p:transition>
     </mc:Choice>
-    <mc:Fallback>
+    <mc:Fallback xmlns="">
       <p:transition spd="slow">
         <p:fade/>
       </p:transition>
@@ -7036,13 +7041,13 @@
   <p:clrMapOvr>
     <a:masterClrMapping/>
   </p:clrMapOvr>
-  <mc:AlternateContent xmlns:mc="http://schemas.openxmlformats.org/markup-compatibility/2006">
-    <mc:Choice xmlns:p159="http://schemas.microsoft.com/office/powerpoint/2015/09/main" Requires="p159">
+  <mc:AlternateContent xmlns:mc="http://schemas.openxmlformats.org/markup-compatibility/2006" xmlns:p159="http://schemas.microsoft.com/office/powerpoint/2015/09/main">
+    <mc:Choice Requires="p159">
       <p:transition xmlns:p14="http://schemas.microsoft.com/office/powerpoint/2010/main" spd="slow" p14:dur="2000">
         <p159:morph option="byObject"/>
       </p:transition>
     </mc:Choice>
-    <mc:Fallback>
+    <mc:Fallback xmlns="">
       <p:transition spd="slow">
         <p:fade/>
       </p:transition>
@@ -7147,13 +7152,13 @@
   <p:clrMapOvr>
     <a:masterClrMapping/>
   </p:clrMapOvr>
-  <mc:AlternateContent xmlns:mc="http://schemas.openxmlformats.org/markup-compatibility/2006">
-    <mc:Choice xmlns:p159="http://schemas.microsoft.com/office/powerpoint/2015/09/main" Requires="p159">
+  <mc:AlternateContent xmlns:mc="http://schemas.openxmlformats.org/markup-compatibility/2006" xmlns:p159="http://schemas.microsoft.com/office/powerpoint/2015/09/main">
+    <mc:Choice Requires="p159">
       <p:transition xmlns:p14="http://schemas.microsoft.com/office/powerpoint/2010/main" spd="slow" p14:dur="2000">
         <p159:morph option="byObject"/>
       </p:transition>
     </mc:Choice>
-    <mc:Fallback>
+    <mc:Fallback xmlns="">
       <p:transition spd="slow">
         <p:fade/>
       </p:transition>
@@ -7696,13 +7701,13 @@
   <p:clrMapOvr>
     <a:masterClrMapping/>
   </p:clrMapOvr>
-  <mc:AlternateContent xmlns:mc="http://schemas.openxmlformats.org/markup-compatibility/2006">
-    <mc:Choice xmlns:p159="http://schemas.microsoft.com/office/powerpoint/2015/09/main" Requires="p159">
+  <mc:AlternateContent xmlns:mc="http://schemas.openxmlformats.org/markup-compatibility/2006" xmlns:p159="http://schemas.microsoft.com/office/powerpoint/2015/09/main">
+    <mc:Choice Requires="p159">
       <p:transition xmlns:p14="http://schemas.microsoft.com/office/powerpoint/2010/main" spd="slow" p14:dur="2000">
         <p159:morph option="byObject"/>
       </p:transition>
     </mc:Choice>
-    <mc:Fallback>
+    <mc:Fallback xmlns="">
       <p:transition spd="slow">
         <p:fade/>
       </p:transition>
@@ -8277,13 +8282,13 @@
   <p:clrMapOvr>
     <a:masterClrMapping/>
   </p:clrMapOvr>
-  <mc:AlternateContent xmlns:mc="http://schemas.openxmlformats.org/markup-compatibility/2006">
-    <mc:Choice xmlns:p159="http://schemas.microsoft.com/office/powerpoint/2015/09/main" Requires="p159">
+  <mc:AlternateContent xmlns:mc="http://schemas.openxmlformats.org/markup-compatibility/2006" xmlns:p159="http://schemas.microsoft.com/office/powerpoint/2015/09/main">
+    <mc:Choice Requires="p159">
       <p:transition xmlns:p14="http://schemas.microsoft.com/office/powerpoint/2010/main" spd="slow" p14:dur="2000">
         <p159:morph option="byObject"/>
       </p:transition>
     </mc:Choice>
-    <mc:Fallback>
+    <mc:Fallback xmlns="">
       <p:transition spd="slow">
         <p:fade/>
       </p:transition>
@@ -8900,13 +8905,13 @@
   <p:clrMapOvr>
     <a:masterClrMapping/>
   </p:clrMapOvr>
-  <mc:AlternateContent xmlns:mc="http://schemas.openxmlformats.org/markup-compatibility/2006">
-    <mc:Choice xmlns:p159="http://schemas.microsoft.com/office/powerpoint/2015/09/main" Requires="p159">
+  <mc:AlternateContent xmlns:mc="http://schemas.openxmlformats.org/markup-compatibility/2006" xmlns:p159="http://schemas.microsoft.com/office/powerpoint/2015/09/main">
+    <mc:Choice Requires="p159">
       <p:transition xmlns:p14="http://schemas.microsoft.com/office/powerpoint/2010/main" spd="slow" p14:dur="2000">
         <p159:morph option="byObject"/>
       </p:transition>
     </mc:Choice>
-    <mc:Fallback>
+    <mc:Fallback xmlns="">
       <p:transition spd="slow">
         <p:fade/>
       </p:transition>
@@ -9425,13 +9430,13 @@
   <p:clrMapOvr>
     <a:masterClrMapping/>
   </p:clrMapOvr>
-  <mc:AlternateContent xmlns:mc="http://schemas.openxmlformats.org/markup-compatibility/2006">
-    <mc:Choice xmlns:p159="http://schemas.microsoft.com/office/powerpoint/2015/09/main" Requires="p159">
+  <mc:AlternateContent xmlns:mc="http://schemas.openxmlformats.org/markup-compatibility/2006" xmlns:p159="http://schemas.microsoft.com/office/powerpoint/2015/09/main">
+    <mc:Choice Requires="p159">
       <p:transition xmlns:p14="http://schemas.microsoft.com/office/powerpoint/2010/main" spd="slow" p14:dur="2000">
         <p159:morph option="byObject"/>
       </p:transition>
     </mc:Choice>
-    <mc:Fallback>
+    <mc:Fallback xmlns="">
       <p:transition spd="slow">
         <p:fade/>
       </p:transition>
@@ -9967,10 +9972,10 @@
           <p:nvPr/>
         </p:nvPicPr>
         <p:blipFill>
-          <a:blip>
+          <a:blip r:embed="rId2">
             <a:extLst>
               <a:ext uri="{96DAC541-7B7A-43D3-8B79-37D633B846F1}">
-                <asvg:svgBlip xmlns:asvg="http://schemas.microsoft.com/office/drawing/2016/SVG/main" r:embed="rId2"/>
+                <asvg:svgBlip xmlns:asvg="http://schemas.microsoft.com/office/drawing/2016/SVG/main" r:embed="rId3"/>
               </a:ext>
             </a:extLst>
           </a:blip>
@@ -9999,13 +10004,13 @@
   <p:clrMapOvr>
     <a:masterClrMapping/>
   </p:clrMapOvr>
-  <mc:AlternateContent xmlns:mc="http://schemas.openxmlformats.org/markup-compatibility/2006">
-    <mc:Choice xmlns:p159="http://schemas.microsoft.com/office/powerpoint/2015/09/main" Requires="p159">
+  <mc:AlternateContent xmlns:mc="http://schemas.openxmlformats.org/markup-compatibility/2006" xmlns:p159="http://schemas.microsoft.com/office/powerpoint/2015/09/main">
+    <mc:Choice Requires="p159">
       <p:transition xmlns:p14="http://schemas.microsoft.com/office/powerpoint/2010/main" spd="slow" p14:dur="2000">
         <p159:morph option="byObject"/>
       </p:transition>
     </mc:Choice>
-    <mc:Fallback>
+    <mc:Fallback xmlns="">
       <p:transition spd="slow">
         <p:fade/>
       </p:transition>
@@ -10817,13 +10822,13 @@
   <p:clrMapOvr>
     <a:masterClrMapping/>
   </p:clrMapOvr>
-  <mc:AlternateContent xmlns:mc="http://schemas.openxmlformats.org/markup-compatibility/2006">
-    <mc:Choice xmlns:p159="http://schemas.microsoft.com/office/powerpoint/2015/09/main" Requires="p159">
+  <mc:AlternateContent xmlns:mc="http://schemas.openxmlformats.org/markup-compatibility/2006" xmlns:p159="http://schemas.microsoft.com/office/powerpoint/2015/09/main">
+    <mc:Choice Requires="p159">
       <p:transition xmlns:p14="http://schemas.microsoft.com/office/powerpoint/2010/main" spd="slow" p14:dur="2000">
         <p159:morph option="byObject"/>
       </p:transition>
     </mc:Choice>
-    <mc:Fallback>
+    <mc:Fallback xmlns="">
       <p:transition spd="slow">
         <p:fade/>
       </p:transition>
@@ -11368,8 +11373,8 @@
         </p:nvSpPr>
         <p:spPr>
           <a:xfrm>
-            <a:off x="8005929" y="3065008"/>
-            <a:ext cx="2204342" cy="1107996"/>
+            <a:off x="7880220" y="3162734"/>
+            <a:ext cx="2455760" cy="1107996"/>
           </a:xfrm>
           <a:prstGeom prst="rect">
             <a:avLst/>
@@ -11403,13 +11408,13 @@
   <p:clrMapOvr>
     <a:masterClrMapping/>
   </p:clrMapOvr>
-  <mc:AlternateContent xmlns:mc="http://schemas.openxmlformats.org/markup-compatibility/2006">
-    <mc:Choice xmlns:p159="http://schemas.microsoft.com/office/powerpoint/2015/09/main" Requires="p159">
+  <mc:AlternateContent xmlns:mc="http://schemas.openxmlformats.org/markup-compatibility/2006" xmlns:p159="http://schemas.microsoft.com/office/powerpoint/2015/09/main">
+    <mc:Choice Requires="p159">
       <p:transition xmlns:p14="http://schemas.microsoft.com/office/powerpoint/2010/main" spd="slow" p14:dur="2000">
         <p159:morph option="byObject"/>
       </p:transition>
     </mc:Choice>
-    <mc:Fallback>
+    <mc:Fallback xmlns="">
       <p:transition spd="slow">
         <p:fade/>
       </p:transition>
@@ -11988,13 +11993,13 @@
   <p:clrMapOvr>
     <a:masterClrMapping/>
   </p:clrMapOvr>
-  <mc:AlternateContent xmlns:mc="http://schemas.openxmlformats.org/markup-compatibility/2006">
-    <mc:Choice xmlns:p159="http://schemas.microsoft.com/office/powerpoint/2015/09/main" Requires="p159">
+  <mc:AlternateContent xmlns:mc="http://schemas.openxmlformats.org/markup-compatibility/2006" xmlns:p159="http://schemas.microsoft.com/office/powerpoint/2015/09/main">
+    <mc:Choice Requires="p159">
       <p:transition xmlns:p14="http://schemas.microsoft.com/office/powerpoint/2010/main" spd="slow" p14:dur="2000">
         <p159:morph option="byObject"/>
       </p:transition>
     </mc:Choice>
-    <mc:Fallback>
+    <mc:Fallback xmlns="">
       <p:transition spd="slow">
         <p:fade/>
       </p:transition>

--- a/Презентација.pptx
+++ b/Презентација.pptx
@@ -9934,21 +9934,7 @@
                 <a:latin typeface="Roboto" pitchFamily="2" charset="0"/>
                 <a:ea typeface="Roboto" pitchFamily="2" charset="0"/>
               </a:rPr>
-              <a:t> библиотека што се користи за градење на веб-апликации. Со него се создаваат рутите, функциите за рутите и друго. Тој е многу употребуван во мојот проект за создавање на рутите и поврзување на </a:t>
-            </a:r>
-            <a:r>
-              <a:rPr lang="mk-MK" sz="3200" dirty="0" err="1">
-                <a:latin typeface="Roboto" pitchFamily="2" charset="0"/>
-                <a:ea typeface="Roboto" pitchFamily="2" charset="0"/>
-              </a:rPr>
-              <a:t>све</a:t>
-            </a:r>
-            <a:r>
-              <a:rPr lang="mk-MK" sz="3200" dirty="0">
-                <a:latin typeface="Roboto" pitchFamily="2" charset="0"/>
-                <a:ea typeface="Roboto" pitchFamily="2" charset="0"/>
-              </a:rPr>
-              <a:t>.</a:t>
+              <a:t> библиотека што се користи за градење на веб-апликации. Со него се создаваат рутите, функциите за рутите и друго. Тој е многу употребуван во мојот проект за создавање на рутите и поврзување на се.</a:t>
             </a:r>
             <a:endParaRPr lang="en-US" sz="3200" dirty="0">
               <a:latin typeface="Roboto" pitchFamily="2" charset="0"/>
